--- a/assets/ogp/master/OGP_Template_Master.pptx
+++ b/assets/ogp/master/OGP_Template_Master.pptx
@@ -15,6 +15,8 @@
     <p:sldId id="263" r:id="rId9"/>
     <p:sldId id="264" r:id="rId10"/>
     <p:sldId id="265" r:id="rId11"/>
+    <p:sldId id="266" r:id="rId17"/>
+    <p:sldId id="267" r:id="rId18"/>
   </p:sldIdLst>
   <p:notesMasterIdLst>
     <p:notesMasterId r:id="rId12"/>
@@ -2455,6 +2457,302 @@
 </p:sld>
 </file>
 
+<file path=ppt/slides/slide11.xml><?xml version="1.0" encoding="utf-8"?>
+<p:sld xmlns:a="http://schemas.openxmlformats.org/drawingml/2006/main" xmlns:r="http://schemas.openxmlformats.org/officeDocument/2006/relationships" xmlns:p="http://schemas.openxmlformats.org/presentationml/2006/main">
+  <p:cSld name="community">
+    <p:spTree>
+      <p:nvGrpSpPr>
+        <p:cNvPr id="1" name=""/>
+        <p:cNvGrpSpPr/>
+        <p:nvPr/>
+      </p:nvGrpSpPr>
+      <p:grpSpPr>
+        <a:xfrm>
+          <a:off x="0" y="0"/>
+          <a:ext cx="0" cy="0"/>
+          <a:chOff x="0" y="0"/>
+          <a:chExt cx="0" cy="0"/>
+        </a:xfrm>
+      </p:grpSpPr>
+      <p:sp>
+        <p:nvSpPr>
+          <p:cNvPr id="2" name="Text 5"/>
+          <p:cNvSpPr/>
+          <p:nvPr>
+            <p:ph idx="105" type="body" hasCustomPrompt="1"/>
+          </p:nvPr>
+        </p:nvSpPr>
+        <p:spPr>
+          <a:xfrm>
+            <a:off x="857250" y="1677924"/>
+            <a:ext cx="9715500" cy="256032"/>
+          </a:xfrm>
+          <a:prstGeom prst="rect">
+            <a:avLst/>
+          </a:prstGeom>
+          <a:noFill/>
+          <a:ln/>
+        </p:spPr>
+        <p:txBody>
+          <a:bodyPr wrap="square" lIns="0" tIns="0" rIns="0" bIns="0" rtlCol="0" anchor="ctr"/>
+          <a:lstStyle/>
+          <a:p>
+            <a:pPr algn="ctr" indent="0" marL="0">
+              <a:buNone/>
+            </a:pPr>
+            <a:r>
+              <a:rPr lang="en-US" sz="1200" spc="250" kern="0" dirty="0">
+                <a:solidFill>
+                  <a:srgbClr val="C0B8AD"/>
+                </a:solidFill>
+                <a:latin typeface="Noto Sans JP" pitchFamily="34" charset="0"/>
+                <a:ea typeface="Noto Sans JP" pitchFamily="34" charset="-122"/>
+                <a:cs typeface="Noto Sans JP" pitchFamily="34" charset="-120"/>
+              </a:rPr>
+              <a:t>DREAMIN' SPIRAL ACADEMY</a:t>
+            </a:r>
+            <a:endParaRPr lang="en-US" sz="1200" dirty="0"/>
+          </a:p>
+        </p:txBody>
+      </p:sp>
+      <p:sp>
+        <p:nvSpPr>
+          <p:cNvPr id="3" name="Text 5"/>
+          <p:cNvSpPr/>
+          <p:nvPr>
+            <p:ph idx="106" type="title" hasCustomPrompt="1"/>
+          </p:nvPr>
+        </p:nvSpPr>
+        <p:spPr>
+          <a:xfrm>
+            <a:off x="857250" y="2467356"/>
+            <a:ext cx="9715500" cy="960120"/>
+          </a:xfrm>
+          <a:prstGeom prst="rect">
+            <a:avLst/>
+          </a:prstGeom>
+          <a:noFill/>
+          <a:ln/>
+        </p:spPr>
+        <p:txBody>
+          <a:bodyPr wrap="square" lIns="0" tIns="0" rIns="0" bIns="0" rtlCol="0" anchor="ctr"/>
+          <a:lstStyle/>
+          <a:p>
+            <a:pPr algn="ctr" indent="0" marL="0">
+              <a:buNone/>
+            </a:pPr>
+            <a:r>
+              <a:rPr lang="en-US" sz="6600" dirty="0">
+                <a:solidFill>
+                  <a:srgbClr val="F7F6F4"/>
+                </a:solidFill>
+                <a:latin typeface="Noto Sans JP" pitchFamily="34" charset="0"/>
+                <a:ea typeface="Noto Sans JP" pitchFamily="34" charset="-122"/>
+                <a:cs typeface="Noto Sans JP" pitchFamily="34" charset="-120"/>
+              </a:rPr>
+              <a:t>Community に参加する</a:t>
+            </a:r>
+            <a:endParaRPr lang="en-US" sz="6600" dirty="0"/>
+          </a:p>
+        </p:txBody>
+      </p:sp>
+      <p:sp>
+        <p:nvSpPr>
+          <p:cNvPr id="4" name="Text 5"/>
+          <p:cNvSpPr/>
+          <p:nvPr>
+            <p:ph idx="107" type="body" hasCustomPrompt="1"/>
+          </p:nvPr>
+        </p:nvSpPr>
+        <p:spPr>
+          <a:xfrm>
+            <a:off x="857250" y="3732276"/>
+            <a:ext cx="9715500" cy="411480"/>
+          </a:xfrm>
+          <a:prstGeom prst="rect">
+            <a:avLst/>
+          </a:prstGeom>
+          <a:noFill/>
+          <a:ln/>
+        </p:spPr>
+        <p:txBody>
+          <a:bodyPr wrap="square" lIns="0" tIns="0" rIns="0" bIns="0" rtlCol="0" anchor="ctr"/>
+          <a:lstStyle/>
+          <a:p>
+            <a:pPr algn="ctr" indent="0" marL="0">
+              <a:buNone/>
+            </a:pPr>
+            <a:r>
+              <a:rPr lang="en-US" sz="2250" dirty="0">
+                <a:solidFill>
+                  <a:srgbClr val="A8A49E"/>
+                </a:solidFill>
+                <a:latin typeface="Noto Sans JP" pitchFamily="34" charset="0"/>
+                <a:ea typeface="Noto Sans JP" pitchFamily="34" charset="-122"/>
+                <a:cs typeface="Noto Sans JP" pitchFamily="34" charset="-120"/>
+              </a:rPr>
+              <a:t>共に育つ場へ。</a:t>
+            </a:r>
+            <a:endParaRPr lang="en-US" sz="2250" dirty="0"/>
+          </a:p>
+        </p:txBody>
+      </p:sp>
+    </p:spTree>
+  </p:cSld>
+  <p:clrMapOvr>
+    <a:masterClrMapping/>
+  </p:clrMapOvr>
+</p:sld>
+</file>
+
+<file path=ppt/slides/slide12.xml><?xml version="1.0" encoding="utf-8"?>
+<p:sld xmlns:a="http://schemas.openxmlformats.org/drawingml/2006/main" xmlns:r="http://schemas.openxmlformats.org/officeDocument/2006/relationships" xmlns:p="http://schemas.openxmlformats.org/presentationml/2006/main">
+  <p:cSld name="premium">
+    <p:spTree>
+      <p:nvGrpSpPr>
+        <p:cNvPr id="1" name=""/>
+        <p:cNvGrpSpPr/>
+        <p:nvPr/>
+      </p:nvGrpSpPr>
+      <p:grpSpPr>
+        <a:xfrm>
+          <a:off x="0" y="0"/>
+          <a:ext cx="0" cy="0"/>
+          <a:chOff x="0" y="0"/>
+          <a:chExt cx="0" cy="0"/>
+        </a:xfrm>
+      </p:grpSpPr>
+      <p:sp>
+        <p:nvSpPr>
+          <p:cNvPr id="2" name="Text 5"/>
+          <p:cNvSpPr/>
+          <p:nvPr>
+            <p:ph idx="105" type="body" hasCustomPrompt="1"/>
+          </p:nvPr>
+        </p:nvSpPr>
+        <p:spPr>
+          <a:xfrm>
+            <a:off x="857250" y="1677924"/>
+            <a:ext cx="9715500" cy="256032"/>
+          </a:xfrm>
+          <a:prstGeom prst="rect">
+            <a:avLst/>
+          </a:prstGeom>
+          <a:noFill/>
+          <a:ln/>
+        </p:spPr>
+        <p:txBody>
+          <a:bodyPr wrap="square" lIns="0" tIns="0" rIns="0" bIns="0" rtlCol="0" anchor="ctr"/>
+          <a:lstStyle/>
+          <a:p>
+            <a:pPr algn="ctr" indent="0" marL="0">
+              <a:buNone/>
+            </a:pPr>
+            <a:r>
+              <a:rPr lang="en-US" sz="1200" spc="250" kern="0" dirty="0">
+                <a:solidFill>
+                  <a:srgbClr val="C0B8AD"/>
+                </a:solidFill>
+                <a:latin typeface="Noto Sans JP" pitchFamily="34" charset="0"/>
+                <a:ea typeface="Noto Sans JP" pitchFamily="34" charset="-122"/>
+                <a:cs typeface="Noto Sans JP" pitchFamily="34" charset="-120"/>
+              </a:rPr>
+              <a:t>DREAMIN' SPIRAL ACADEMY</a:t>
+            </a:r>
+            <a:endParaRPr lang="en-US" sz="1200" dirty="0"/>
+          </a:p>
+        </p:txBody>
+      </p:sp>
+      <p:sp>
+        <p:nvSpPr>
+          <p:cNvPr id="3" name="Text 5"/>
+          <p:cNvSpPr/>
+          <p:nvPr>
+            <p:ph idx="106" type="title" hasCustomPrompt="1"/>
+          </p:nvPr>
+        </p:nvSpPr>
+        <p:spPr>
+          <a:xfrm>
+            <a:off x="857250" y="2467356"/>
+            <a:ext cx="9715500" cy="960120"/>
+          </a:xfrm>
+          <a:prstGeom prst="rect">
+            <a:avLst/>
+          </a:prstGeom>
+          <a:noFill/>
+          <a:ln/>
+        </p:spPr>
+        <p:txBody>
+          <a:bodyPr wrap="square" lIns="0" tIns="0" rIns="0" bIns="0" rtlCol="0" anchor="ctr"/>
+          <a:lstStyle/>
+          <a:p>
+            <a:pPr algn="ctr" indent="0" marL="0">
+              <a:buNone/>
+            </a:pPr>
+            <a:r>
+              <a:rPr lang="en-US" sz="6600" dirty="0">
+                <a:solidFill>
+                  <a:srgbClr val="F7F6F4"/>
+                </a:solidFill>
+                <a:latin typeface="Noto Sans JP" pitchFamily="34" charset="0"/>
+                <a:ea typeface="Noto Sans JP" pitchFamily="34" charset="-122"/>
+                <a:cs typeface="Noto Sans JP" pitchFamily="34" charset="-120"/>
+              </a:rPr>
+              <a:t>Premium 伴走を始める</a:t>
+            </a:r>
+            <a:endParaRPr lang="en-US" sz="6600" dirty="0"/>
+          </a:p>
+        </p:txBody>
+      </p:sp>
+      <p:sp>
+        <p:nvSpPr>
+          <p:cNvPr id="4" name="Text 5"/>
+          <p:cNvSpPr/>
+          <p:nvPr>
+            <p:ph idx="107" type="body" hasCustomPrompt="1"/>
+          </p:nvPr>
+        </p:nvSpPr>
+        <p:spPr>
+          <a:xfrm>
+            <a:off x="857250" y="3732276"/>
+            <a:ext cx="9715500" cy="411480"/>
+          </a:xfrm>
+          <a:prstGeom prst="rect">
+            <a:avLst/>
+          </a:prstGeom>
+          <a:noFill/>
+          <a:ln/>
+        </p:spPr>
+        <p:txBody>
+          <a:bodyPr wrap="square" lIns="0" tIns="0" rIns="0" bIns="0" rtlCol="0" anchor="ctr"/>
+          <a:lstStyle/>
+          <a:p>
+            <a:pPr algn="ctr" indent="0" marL="0">
+              <a:buNone/>
+            </a:pPr>
+            <a:r>
+              <a:rPr lang="en-US" sz="2250" dirty="0">
+                <a:solidFill>
+                  <a:srgbClr val="A8A49E"/>
+                </a:solidFill>
+                <a:latin typeface="Noto Sans JP" pitchFamily="34" charset="0"/>
+                <a:ea typeface="Noto Sans JP" pitchFamily="34" charset="-122"/>
+                <a:cs typeface="Noto Sans JP" pitchFamily="34" charset="-120"/>
+              </a:rPr>
+              <a:t>個別の伴走を、始める。</a:t>
+            </a:r>
+            <a:endParaRPr lang="en-US" sz="2250" dirty="0"/>
+          </a:p>
+        </p:txBody>
+      </p:sp>
+    </p:spTree>
+  </p:cSld>
+  <p:clrMapOvr>
+    <a:masterClrMapping/>
+  </p:clrMapOvr>
+</p:sld>
+</file>
+
 <file path=ppt/slides/slide2.xml><?xml version="1.0" encoding="utf-8"?>
 <p:sld xmlns:a="http://schemas.openxmlformats.org/drawingml/2006/main" xmlns:r="http://schemas.openxmlformats.org/officeDocument/2006/relationships" xmlns:p="http://schemas.openxmlformats.org/presentationml/2006/main">
   <p:cSld name="top">

--- a/assets/ogp/master/OGP_Template_Master.pptx
+++ b/assets/ogp/master/OGP_Template_Master.pptx
@@ -17,6 +17,7 @@
     <p:sldId id="265" r:id="rId11"/>
     <p:sldId id="266" r:id="rId17"/>
     <p:sldId id="267" r:id="rId18"/>
+    <p:sldId id="268" r:id="rId19"/>
   </p:sldIdLst>
   <p:notesMasterIdLst>
     <p:notesMasterId r:id="rId12"/>
@@ -2753,6 +2754,154 @@
 </p:sld>
 </file>
 
+<file path=ppt/slides/slide13.xml><?xml version="1.0" encoding="utf-8"?>
+<p:sld xmlns:a="http://schemas.openxmlformats.org/drawingml/2006/main" xmlns:r="http://schemas.openxmlformats.org/officeDocument/2006/relationships" xmlns:p="http://schemas.openxmlformats.org/presentationml/2006/main">
+  <p:cSld name="premium">
+    <p:spTree>
+      <p:nvGrpSpPr>
+        <p:cNvPr id="1" name=""/>
+        <p:cNvGrpSpPr/>
+        <p:nvPr/>
+      </p:nvGrpSpPr>
+      <p:grpSpPr>
+        <a:xfrm>
+          <a:off x="0" y="0"/>
+          <a:ext cx="0" cy="0"/>
+          <a:chOff x="0" y="0"/>
+          <a:chExt cx="0" cy="0"/>
+        </a:xfrm>
+      </p:grpSpPr>
+      <p:sp>
+        <p:nvSpPr>
+          <p:cNvPr id="2" name="Text 5"/>
+          <p:cNvSpPr/>
+          <p:nvPr>
+            <p:ph idx="105" type="body" hasCustomPrompt="1"/>
+          </p:nvPr>
+        </p:nvSpPr>
+        <p:spPr>
+          <a:xfrm>
+            <a:off x="857250" y="1677924"/>
+            <a:ext cx="9715500" cy="256032"/>
+          </a:xfrm>
+          <a:prstGeom prst="rect">
+            <a:avLst/>
+          </a:prstGeom>
+          <a:noFill/>
+          <a:ln/>
+        </p:spPr>
+        <p:txBody>
+          <a:bodyPr wrap="square" lIns="0" tIns="0" rIns="0" bIns="0" rtlCol="0" anchor="ctr"/>
+          <a:lstStyle/>
+          <a:p>
+            <a:pPr algn="ctr" indent="0" marL="0">
+              <a:buNone/>
+            </a:pPr>
+            <a:r>
+              <a:rPr lang="en-US" sz="1200" spc="250" kern="0" dirty="0">
+                <a:solidFill>
+                  <a:srgbClr val="C0B8AD"/>
+                </a:solidFill>
+                <a:latin typeface="Noto Sans JP" pitchFamily="34" charset="0"/>
+                <a:ea typeface="Noto Sans JP" pitchFamily="34" charset="-122"/>
+                <a:cs typeface="Noto Sans JP" pitchFamily="34" charset="-120"/>
+              </a:rPr>
+              <a:t>DREAMIN' SPIRAL ACADEMY</a:t>
+            </a:r>
+            <a:endParaRPr lang="en-US" sz="1200" dirty="0"/>
+          </a:p>
+        </p:txBody>
+      </p:sp>
+      <p:sp>
+        <p:nvSpPr>
+          <p:cNvPr id="3" name="Text 5"/>
+          <p:cNvSpPr/>
+          <p:nvPr>
+            <p:ph idx="106" type="title" hasCustomPrompt="1"/>
+          </p:nvPr>
+        </p:nvSpPr>
+        <p:spPr>
+          <a:xfrm>
+            <a:off x="857250" y="2467356"/>
+            <a:ext cx="9715500" cy="960120"/>
+          </a:xfrm>
+          <a:prstGeom prst="rect">
+            <a:avLst/>
+          </a:prstGeom>
+          <a:noFill/>
+          <a:ln/>
+        </p:spPr>
+        <p:txBody>
+          <a:bodyPr wrap="square" lIns="0" tIns="0" rIns="0" bIns="0" rtlCol="0" anchor="ctr"/>
+          <a:lstStyle/>
+          <a:p>
+            <a:pPr algn="ctr" indent="0" marL="0">
+              <a:buNone/>
+            </a:pPr>
+            <a:r>
+              <a:rPr lang="en-US" sz="6600" dirty="0">
+                <a:solidFill>
+                  <a:srgbClr val="F7F6F4"/>
+                </a:solidFill>
+                <a:latin typeface="Noto Sans JP" pitchFamily="34" charset="0"/>
+                <a:ea typeface="Noto Sans JP" pitchFamily="34" charset="-122"/>
+                <a:cs typeface="Noto Sans JP" pitchFamily="34" charset="-120"/>
+              </a:rPr>
+              <a:t>オーナープログラム</a:t>
+            </a:r>
+            <a:endParaRPr lang="en-US" sz="6600" dirty="0"/>
+          </a:p>
+        </p:txBody>
+      </p:sp>
+      <p:sp>
+        <p:nvSpPr>
+          <p:cNvPr id="4" name="Text 5"/>
+          <p:cNvSpPr/>
+          <p:nvPr>
+            <p:ph idx="107" type="body" hasCustomPrompt="1"/>
+          </p:nvPr>
+        </p:nvSpPr>
+        <p:spPr>
+          <a:xfrm>
+            <a:off x="857250" y="3732276"/>
+            <a:ext cx="9715500" cy="411480"/>
+          </a:xfrm>
+          <a:prstGeom prst="rect">
+            <a:avLst/>
+          </a:prstGeom>
+          <a:noFill/>
+          <a:ln/>
+        </p:spPr>
+        <p:txBody>
+          <a:bodyPr wrap="square" lIns="0" tIns="0" rIns="0" bIns="0" rtlCol="0" anchor="ctr"/>
+          <a:lstStyle/>
+          <a:p>
+            <a:pPr algn="ctr" indent="0" marL="0">
+              <a:buNone/>
+            </a:pPr>
+            <a:r>
+              <a:rPr lang="en-US" sz="2250" dirty="0">
+                <a:solidFill>
+                  <a:srgbClr val="A8A49E"/>
+                </a:solidFill>
+                <a:latin typeface="Noto Sans JP" pitchFamily="34" charset="0"/>
+                <a:ea typeface="Noto Sans JP" pitchFamily="34" charset="-122"/>
+                <a:cs typeface="Noto Sans JP" pitchFamily="34" charset="-120"/>
+              </a:rPr>
+              <a:t>自分がオーナーとなり、AIと一緒に事業の仕組みをつくる。</a:t>
+            </a:r>
+            <a:endParaRPr lang="en-US" sz="2250" dirty="0"/>
+          </a:p>
+        </p:txBody>
+      </p:sp>
+    </p:spTree>
+  </p:cSld>
+  <p:clrMapOvr>
+    <a:masterClrMapping/>
+  </p:clrMapOvr>
+</p:sld>
+</file>
+
 <file path=ppt/slides/slide2.xml><?xml version="1.0" encoding="utf-8"?>
 <p:sld xmlns:a="http://schemas.openxmlformats.org/drawingml/2006/main" xmlns:r="http://schemas.openxmlformats.org/officeDocument/2006/relationships" xmlns:p="http://schemas.openxmlformats.org/presentationml/2006/main">
   <p:cSld name="top">
@@ -3331,7 +3480,7 @@
                 <a:ea typeface="Noto Sans JP" pitchFamily="34" charset="-122"/>
                 <a:cs typeface="Noto Sans JP" pitchFamily="34" charset="-120"/>
               </a:rPr>
-              <a:t>Community と Premium、二つの関わり方。</a:t>
+              <a:t>三つの入口から、今の自分に合う形で。</a:t>
             </a:r>
             <a:endParaRPr lang="en-US" sz="2250" dirty="0"/>
           </a:p>
